--- a/tests/fixtures/clean.pptx
+++ b/tests/fixtures/clean.pptx
@@ -3105,6 +3105,7 @@
           <a:lstStyle/>
           <a:p>
             <a:r>
+              <a:rPr lang="en-US"/>
               <a:t>Q4 Accessible Presentation</a:t>
             </a:r>
           </a:p>
@@ -3126,6 +3127,7 @@
           <a:lstStyle/>
           <a:p>
             <a:r>
+              <a:rPr lang="en-US"/>
               <a:t>Executive Summary</a:t>
             </a:r>
           </a:p>
@@ -3165,6 +3167,7 @@
           <a:lstStyle/>
           <a:p>
             <a:r>
+              <a:rPr lang="en-US"/>
               <a:t>Financial Highlights</a:t>
             </a:r>
           </a:p>
